--- a/SimReal-BP-v27.pptx
+++ b/SimReal-BP-v27.pptx
@@ -5941,7 +5941,7 @@
                 <a:cs typeface="Instrument Sans"/>
                 <a:sym typeface="Instrument Sans"/>
               </a:rPr>
-              <a:t>面向AI实验室与企业：训练环境、AI数据与评测</a:t>
+              <a:t>面向AI实验室与企业：训练环境、AI数据与自我进化</a:t>
             </a:r>
           </a:p>
         </p:txBody>
@@ -6689,7 +6689,7 @@
                 <a:cs typeface="Newsreader"/>
                 <a:sym typeface="Newsreader"/>
               </a:rPr>
-              <a:t>环境每运行一次，都在产生训练数据：</a:t>
+              <a:t>环境与专家网络，产出三类AI数据：</a:t>
             </a:r>
             <a:r>
               <a:rPr lang="zh-CN" sz="1600" b="0" i="0" u="none" strike="noStrike" cap="none">
@@ -7186,7 +7186,7 @@
                 <a:cs typeface="Instrument Sans"/>
                 <a:sym typeface="Instrument Sans"/>
               </a:rPr>
-              <a:t>来自20万+专家网络：真实工作里的示范、判断与评分标准</a:t>
+              <a:t>背靠20万+专家网络：真实工作里的示范、判断与评分标准</a:t>
             </a:r>
           </a:p>
         </p:txBody>
@@ -7264,7 +7264,7 @@
                 <a:cs typeface="Instrument Sans"/>
                 <a:sym typeface="Instrument Sans"/>
               </a:rPr>
-              <a:t>覆盖各行业入门岗位与前沿科研</a:t>
+              <a:t>覆盖各行业入门岗位与顶尖科研</a:t>
             </a:r>
           </a:p>
         </p:txBody>
@@ -7795,7 +7795,7 @@
                 <a:cs typeface="Instrument Sans"/>
                 <a:sym typeface="Instrument Sans"/>
               </a:rPr>
-              <a:t>同一套环境，同时产出数据、评分与训练</a:t>
+              <a:t>数据、评分与训练，共用一套环境</a:t>
             </a:r>
           </a:p>
         </p:txBody>
@@ -7922,7 +7922,7 @@
                 <a:cs typeface="Instrument Sans"/>
                 <a:sym typeface="Instrument Sans"/>
               </a:rPr>
-              <a:t>轨迹的成败由真实结果判定，不靠人工意见</a:t>
+              <a:t>轨迹成败由真实结果判定，不靠人工意见</a:t>
             </a:r>
           </a:p>
         </p:txBody>
@@ -8049,7 +8049,7 @@
                 <a:cs typeface="Instrument Sans"/>
                 <a:sym typeface="Instrument Sans"/>
               </a:rPr>
-              <a:t>模型在哪里出错，下一批数据就补在哪里</a:t>
+              <a:t>模型错在哪，下一批数据就补到哪</a:t>
             </a:r>
           </a:p>
         </p:txBody>
@@ -8098,7 +8098,7 @@
                 <a:cs typeface="Newsreader"/>
                 <a:sym typeface="Newsreader"/>
               </a:rPr>
-              <a:t>今天实验室每年采购85亿美元训练数据与RL环境：</a:t>
+              <a:t>今天实验室每年花85亿美元买训练数据与RL环境：</a:t>
             </a:r>
             <a:r>
               <a:rPr lang="zh-CN" sz="1800" b="0" i="0" u="none" strike="noStrike" cap="none">
@@ -8110,7 +8110,7 @@
                 <a:cs typeface="Newsreader"/>
                 <a:sym typeface="Newsreader"/>
               </a:rPr>
-              <a:t>数据业务直接进入这个市场</a:t>
+              <a:t>这两样，我们都做</a:t>
             </a:r>
             <a:r>
               <a:rPr lang="zh-CN" sz="1800" b="0" i="0" u="none" strike="noStrike" cap="none">
@@ -9171,7 +9171,7 @@
                 <a:cs typeface="Instrument Sans"/>
                 <a:sym typeface="Instrument Sans"/>
               </a:rPr>
-              <a:t>一个能力目标的环境、数据与评测包</a:t>
+              <a:t>一项能力的环境、数据与评测包</a:t>
             </a:r>
           </a:p>
         </p:txBody>
@@ -9841,7 +9841,7 @@
                 <a:cs typeface="Instrument Sans"/>
                 <a:sym typeface="Instrument Sans"/>
               </a:rPr>
-              <a:t>旧任务会被做饱和，新能力需要新数据</a:t>
+              <a:t>旧任务会饱和，新能力需要新数据</a:t>
             </a:r>
           </a:p>
         </p:txBody>
@@ -10531,7 +10531,7 @@
                 <a:cs typeface="Newsreader"/>
                 <a:sym typeface="Newsreader"/>
               </a:rPr>
-              <a:t>交付之后，仍由我们提供</a:t>
+              <a:t>交付只是开始</a:t>
             </a:r>
           </a:p>
         </p:txBody>
@@ -11627,7 +11627,7 @@
                 <a:cs typeface="Instrument Sans"/>
                 <a:sym typeface="Instrument Sans"/>
               </a:rPr>
-              <a:t>仓库星标合计</a:t>
+              <a:t>GitHub星标合计</a:t>
             </a:r>
           </a:p>
         </p:txBody>
@@ -12320,7 +12320,7 @@
                 <a:cs typeface="IBM Plex Mono"/>
                 <a:sym typeface="IBM Plex Mono"/>
               </a:rPr>
-              <a:t>交易机构从业者支持研发</a:t>
+              <a:t>支持我们研发的交易机构从业者</a:t>
             </a:r>
           </a:p>
         </p:txBody>
@@ -13289,7 +13289,7 @@
                 <a:cs typeface="Newsreader"/>
                 <a:sym typeface="Newsreader"/>
               </a:rPr>
-              <a:t>可触达、可验证的专家，来自</a:t>
+              <a:t>可触达、可验证的专家，来自21所顶尖大学：</a:t>
             </a:r>
             <a:r>
               <a:rPr lang="zh-CN" sz="1600" b="0" i="0" u="none" strike="noStrike" cap="none">
@@ -13301,7 +13301,7 @@
                 <a:cs typeface="Newsreader"/>
                 <a:sym typeface="Newsreader"/>
               </a:rPr>
-              <a:t>21所顶尖大学</a:t>
+              <a:t>专家数据的源头</a:t>
             </a:r>
           </a:p>
         </p:txBody>
@@ -13509,7 +13509,7 @@
                 <a:cs typeface="Instrument Sans"/>
                 <a:sym typeface="Instrument Sans"/>
               </a:rPr>
-              <a:t>顶尖大学网络覆盖</a:t>
+              <a:t>顶尖大学</a:t>
             </a:r>
           </a:p>
         </p:txBody>
@@ -17926,7 +17926,7 @@
                 <a:cs typeface="Instrument Sans"/>
                 <a:sym typeface="Instrument Sans"/>
               </a:rPr>
-              <a:t>同一套环境产出数据、评分与训练</a:t>
+              <a:t>同一套环境打通数据、评分与训练</a:t>
             </a:r>
           </a:p>
           <a:p>
@@ -17952,7 +17952,7 @@
                 <a:cs typeface="Instrument Sans"/>
                 <a:sym typeface="Instrument Sans"/>
               </a:rPr>
-              <a:t>每次结果都变成下一轮训练</a:t>
+              <a:t>每次结果都进入下一轮，AI越练越强</a:t>
             </a:r>
           </a:p>
         </p:txBody>
@@ -18001,7 +18001,7 @@
                 <a:cs typeface="IBM Plex Mono"/>
                 <a:sym typeface="IBM Plex Mono"/>
               </a:rPr>
-              <a:t>为什么我们能赢</a:t>
+              <a:t>我们的优势</a:t>
             </a:r>
           </a:p>
         </p:txBody>
@@ -22692,7 +22692,7 @@
                 <a:cs typeface="Instrument Sans"/>
                 <a:sym typeface="Instrument Sans"/>
               </a:rPr>
-              <a:t>从付费试点推进到环境授权、复购与持续更新合同；数据业务批量交付；实盘交易与事件预测的RSI上线</a:t>
+              <a:t>环境从付费试点推进到授权、复购与持续更新合同；AI数据批量交付；RSI在实盘交易与事件预测上线</a:t>
             </a:r>
           </a:p>
         </p:txBody>
@@ -25014,7 +25014,7 @@
                 <a:cs typeface="Instrument Sans"/>
                 <a:sym typeface="Instrument Sans"/>
               </a:rPr>
-              <a:t>授权、交付与持续更新</a:t>
+              <a:t>接入、验收与持续更新</a:t>
             </a:r>
           </a:p>
         </p:txBody>
@@ -25316,7 +25316,7 @@
                 <a:cs typeface="Newsreader"/>
                 <a:sym typeface="Newsreader"/>
               </a:rPr>
-              <a:t> 卖出次数 </a:t>
+              <a:t> 授权次数 </a:t>
             </a:r>
             <a:r>
               <a:rPr lang="zh-CN" sz="1300" b="0" i="0" u="none" strike="noStrike" cap="none">
@@ -25363,7 +25363,7 @@
                 <a:cs typeface="Instrument Sans"/>
                 <a:sym typeface="Instrument Sans"/>
               </a:rPr>
-              <a:t>环境单价2万–30万美元（Epoch AI）；数据按交付量计</a:t>
+              <a:t>环境单价2万–30万美元（Epoch AI）</a:t>
             </a:r>
           </a:p>
         </p:txBody>
@@ -26468,7 +26468,7 @@
                 <a:cs typeface="Newsreader"/>
                 <a:sym typeface="Newsreader"/>
               </a:rPr>
-              <a:t>实盘交易RSI  ·  预测事件RSI  ·  10个行业</a:t>
+              <a:t>实盘交易RSI  ·  事件预测RSI  ·  10个行业</a:t>
             </a:r>
           </a:p>
           <a:p>
@@ -26716,7 +26716,7 @@
                 <a:cs typeface="Newsreader"/>
                 <a:sym typeface="Newsreader"/>
               </a:rPr>
-              <a:t>预测事件RSI上线</a:t>
+              <a:t>事件预测RSI上线</a:t>
             </a:r>
           </a:p>
         </p:txBody>
@@ -28070,7 +28070,7 @@
                 <a:cs typeface="Instrument Sans"/>
                 <a:sym typeface="Instrument Sans"/>
               </a:rPr>
-              <a:t>面向AI实验室与企业：训练环境、Agent轨迹、</a:t>
+              <a:t>面向AI实验室与企业：Agent轨迹、专家与评测数据</a:t>
             </a:r>
           </a:p>
           <a:p>
@@ -28096,7 +28096,7 @@
                 <a:cs typeface="Instrument Sans"/>
                 <a:sym typeface="Instrument Sans"/>
               </a:rPr>
-              <a:t>专家数据与评测；独家环境让AI自我进化（RSI）</a:t>
+              <a:t>独家环境让AI自我进化（RSI）</a:t>
             </a:r>
           </a:p>
         </p:txBody>
@@ -28480,7 +28480,33 @@
                 <a:cs typeface="Instrument Sans"/>
                 <a:sym typeface="Instrument Sans"/>
               </a:rPr>
-              <a:t>Qwen3.8-27B在Xitadel训练后，在未见过的真实行情上交易表现最高提升12%，多次独立复现</a:t>
+              <a:t>Qwen3.8-27B经Xitadel训练，在未见过的真实行情上</a:t>
+            </a:r>
+          </a:p>
+          <a:p>
+            <a:pPr marL="0" marR="0" lvl="0" indent="0" algn="l" rtl="0">
+              <a:lnSpc>
+                <a:spcPct val="114999"/>
+              </a:lnSpc>
+              <a:spcBef>
+                <a:spcPts val="0"/>
+              </a:spcBef>
+              <a:spcAft>
+                <a:spcPts val="0"/>
+              </a:spcAft>
+              <a:buNone/>
+            </a:pPr>
+            <a:r>
+              <a:rPr lang="zh-CN" sz="1100" b="0" i="0" u="none" strike="noStrike" cap="none">
+                <a:solidFill>
+                  <a:srgbClr val="33322F"/>
+                </a:solidFill>
+                <a:latin typeface="Instrument Sans"/>
+                <a:ea typeface="Instrument Sans"/>
+                <a:cs typeface="Instrument Sans"/>
+                <a:sym typeface="Instrument Sans"/>
+              </a:rPr>
+              <a:t>交易表现最高提升12%，多次独立复现</a:t>
             </a:r>
           </a:p>
         </p:txBody>
@@ -28659,7 +28685,7 @@
                 <a:cs typeface="Instrument Sans"/>
                 <a:sym typeface="Instrument Sans"/>
               </a:rPr>
-              <a:t>剑桥、LSE、杜克本科</a:t>
+              <a:t>剑桥、LSE、杜克数学本科</a:t>
             </a:r>
           </a:p>
           <a:p>
@@ -28914,7 +28940,7 @@
                 <a:cs typeface="Instrument Sans"/>
                 <a:sym typeface="Instrument Sans"/>
               </a:rPr>
-              <a:t>2030年训练市场约7,000亿美元，82倍</a:t>
+              <a:t>2030年训练市场约7,000亿美元，是今天的82倍</a:t>
             </a:r>
           </a:p>
         </p:txBody>
@@ -29093,7 +29119,7 @@
                 <a:cs typeface="Instrument Sans"/>
                 <a:sym typeface="Instrument Sans"/>
               </a:rPr>
-              <a:t>人民币，等值美元投资；投后估值5亿元</a:t>
+              <a:t>人民币（等值美元）；投后估值5亿元</a:t>
             </a:r>
           </a:p>
           <a:p>
@@ -30132,7 +30158,7 @@
                 <a:cs typeface="Instrument Sans"/>
                 <a:sym typeface="Instrument Sans"/>
               </a:rPr>
-              <a:t>Xitadel公开预览版：人类参考分80，前沿模型最高77.28（GPT 6），尚无模型越过人类线</a:t>
+              <a:t>Xitadel公开预览版：人类参考分80，前沿模型最高77.28（GPT 6），尚无模型越过人类水平线</a:t>
             </a:r>
           </a:p>
         </p:txBody>
@@ -30259,7 +30285,7 @@
                 <a:cs typeface="Instrument Sans"/>
                 <a:sym typeface="Instrument Sans"/>
               </a:rPr>
-              <a:t>运行记录、指标定义与脚本，尽调时提供</a:t>
+              <a:t>运行记录、指标定义与脚本</a:t>
             </a:r>
           </a:p>
         </p:txBody>
@@ -30785,7 +30811,7 @@
                 <a:cs typeface="Instrument Sans"/>
                 <a:sym typeface="Instrument Sans"/>
               </a:rPr>
-              <a:t>A轮2.5亿美元（2024年9月）、B轮20亿美元（2025年2月）到C轮100亿美元（2025年10月）；200亿美元估值轮次处于早期洽谈（彭博，2026年7月9日）</a:t>
+              <a:t>A轮2.5亿美元（2024年9月）、B轮20亿美元（2025年2月）、C轮100亿美元（2025年10月）；200亿美元估值轮次处于早期洽谈（彭博，2026年7月9日）</a:t>
             </a:r>
           </a:p>
           <a:p>
@@ -34011,7 +34037,7 @@
                 <a:cs typeface="Instrument Sans"/>
                 <a:sym typeface="Instrument Sans"/>
               </a:rPr>
-              <a:t>汇丰港元稳定币发行项目唯一实习生，全程协助香港金管局（HKMA）合规项目</a:t>
+              <a:t>汇丰港元稳定币发行项目唯一实习生，全程协助推进香港金管局（HKMA）合规项目</a:t>
             </a:r>
           </a:p>
           <a:p>
@@ -35397,7 +35423,7 @@
                 <a:cs typeface="Newsreader"/>
                 <a:sym typeface="Newsreader"/>
               </a:rPr>
-              <a:t>18个月内收入涨27倍、估值涨10倍：</a:t>
+              <a:t>Mercor 18个月内收入涨27倍、估值涨10倍：</a:t>
             </a:r>
             <a:r>
               <a:rPr lang="zh-CN" sz="1600" b="0" i="0" u="none" strike="noStrike" cap="none">
@@ -35845,7 +35871,7 @@
                 <a:cs typeface="IBM Plex Mono"/>
                 <a:sym typeface="IBM Plex Mono"/>
               </a:rPr>
-              <a:t>需求</a:t>
+              <a:t>需求增长</a:t>
             </a:r>
           </a:p>
         </p:txBody>
@@ -35946,7 +35972,7 @@
                 <a:cs typeface="Instrument Sans"/>
                 <a:sym typeface="Instrument Sans"/>
               </a:rPr>
-              <a:t>AI智能体市场：7年，79亿→约1,110亿美元</a:t>
+              <a:t>AI智能体市场预测：7年，79亿→约1,110亿美元</a:t>
             </a:r>
           </a:p>
         </p:txBody>
@@ -36327,7 +36353,7 @@
                 <a:cs typeface="Instrument Sans"/>
                 <a:sym typeface="Instrument Sans"/>
               </a:rPr>
-              <a:t>AfterQuery年化收入突破1亿美元</a:t>
+              <a:t>AfterQuery从成立到年化收入1亿美元</a:t>
             </a:r>
           </a:p>
         </p:txBody>
@@ -38429,7 +38455,7 @@
                 <a:cs typeface="Newsreader"/>
                 <a:sym typeface="Newsreader"/>
               </a:rPr>
-              <a:t>事件揭晓后落空</a:t>
+              <a:t>结果一出就落空</a:t>
             </a:r>
           </a:p>
         </p:txBody>
@@ -39759,7 +39785,7 @@
                 <a:cs typeface="Instrument Sans"/>
                 <a:sym typeface="Instrument Sans"/>
               </a:rPr>
-              <a:t>规则下解题</a:t>
+              <a:t>按答案判对错</a:t>
             </a:r>
           </a:p>
         </p:txBody>
@@ -40192,7 +40218,7 @@
                 <a:cs typeface="Newsreader"/>
                 <a:sym typeface="Newsreader"/>
               </a:rPr>
-              <a:t>真实工作没有标准答案。下一代反馈信号，</a:t>
+              <a:t>考满分的AI，未必能放心交付。下一代反馈信号，</a:t>
             </a:r>
             <a:r>
               <a:rPr lang="zh-CN" sz="2200" b="0" i="0" u="none" strike="noStrike" cap="none">
@@ -40739,7 +40765,7 @@
                 <a:cs typeface="Newsreader"/>
                 <a:sym typeface="Newsreader"/>
               </a:rPr>
-              <a:t>训练环境、</a:t>
+              <a:t>AI完成任务，</a:t>
             </a:r>
             <a:r>
               <a:rPr lang="zh-CN" sz="1600" b="0" i="0" u="none" strike="noStrike" cap="none">
@@ -40751,10 +40777,125 @@
                 <a:cs typeface="Newsreader"/>
                 <a:sym typeface="Newsreader"/>
               </a:rPr>
-              <a:t>结果评分</a:t>
-            </a:r>
-            <a:r>
-              <a:rPr lang="zh-CN" sz="1600" b="0" i="0" u="none" strike="noStrike" cap="none">
+              <a:t>真实结果成为下一轮训练信号</a:t>
+            </a:r>
+          </a:p>
+        </p:txBody>
+      </p:sp>
+      <p:sp>
+        <p:nvSpPr>
+          <p:cNvPr id="5005" name="SimReal 5005"/>
+          <p:cNvSpPr/>
+          <p:nvPr/>
+        </p:nvSpPr>
+        <p:spPr>
+          <a:xfrm>
+            <a:off x="548640" y="1645920"/>
+            <a:ext cx="6035040" cy="594360"/>
+          </a:xfrm>
+          <a:prstGeom prst="rect">
+            <a:avLst/>
+          </a:prstGeom>
+          <a:solidFill>
+            <a:srgbClr val="F2F1EC"/>
+          </a:solidFill>
+          <a:ln>
+            <a:noFill/>
+          </a:ln>
+        </p:spPr>
+        <p:txBody>
+          <a:bodyPr/>
+          <a:lstStyle/>
+          <a:p>
+            <a:endParaRPr/>
+          </a:p>
+        </p:txBody>
+      </p:sp>
+      <p:sp>
+        <p:nvSpPr>
+          <p:cNvPr id="5006" name="SimReal 5006"/>
+          <p:cNvSpPr txBox="1"/>
+          <p:nvPr/>
+        </p:nvSpPr>
+        <p:spPr>
+          <a:xfrm>
+            <a:off x="777240" y="1645920"/>
+            <a:ext cx="457200" cy="594360"/>
+          </a:xfrm>
+          <a:prstGeom prst="rect">
+            <a:avLst/>
+          </a:prstGeom>
+          <a:noFill/>
+          <a:ln>
+            <a:noFill/>
+          </a:ln>
+        </p:spPr>
+        <p:txBody>
+          <a:bodyPr spcFirstLastPara="1" wrap="square" lIns="0" tIns="0" rIns="0" bIns="0" anchor="ctr" anchorCtr="0">
+            <a:noAutofit/>
+          </a:bodyPr>
+          <a:lstStyle/>
+          <a:p>
+            <a:pPr marL="0" marR="0" lvl="0" indent="0" algn="l" rtl="0">
+              <a:spcBef>
+                <a:spcPts val="0"/>
+              </a:spcBef>
+              <a:spcAft>
+                <a:spcPts val="0"/>
+              </a:spcAft>
+              <a:buNone/>
+            </a:pPr>
+            <a:r>
+              <a:rPr lang="zh-CN" sz="1000" b="0" i="0" u="none" strike="noStrike" cap="none">
+                <a:solidFill>
+                  <a:srgbClr val="C2410C"/>
+                </a:solidFill>
+                <a:latin typeface="IBM Plex Mono"/>
+                <a:ea typeface="IBM Plex Mono"/>
+                <a:cs typeface="IBM Plex Mono"/>
+                <a:sym typeface="IBM Plex Mono"/>
+              </a:rPr>
+              <a:t>01</a:t>
+            </a:r>
+          </a:p>
+        </p:txBody>
+      </p:sp>
+      <p:sp>
+        <p:nvSpPr>
+          <p:cNvPr id="5007" name="SimReal 5007"/>
+          <p:cNvSpPr txBox="1"/>
+          <p:nvPr/>
+        </p:nvSpPr>
+        <p:spPr>
+          <a:xfrm>
+            <a:off x="1234440" y="1645920"/>
+            <a:ext cx="1554480" cy="594360"/>
+          </a:xfrm>
+          <a:prstGeom prst="rect">
+            <a:avLst/>
+          </a:prstGeom>
+          <a:noFill/>
+          <a:ln>
+            <a:noFill/>
+          </a:ln>
+        </p:spPr>
+        <p:txBody>
+          <a:bodyPr spcFirstLastPara="1" wrap="square" lIns="0" tIns="0" rIns="0" bIns="0" anchor="ctr" anchorCtr="0">
+            <a:noAutofit/>
+          </a:bodyPr>
+          <a:lstStyle/>
+          <a:p>
+            <a:pPr marL="0" marR="0" lvl="0" indent="0" algn="l" rtl="0">
+              <a:spcBef>
+                <a:spcPts val="0"/>
+              </a:spcBef>
+              <a:spcAft>
+                <a:spcPts val="0"/>
+              </a:spcAft>
+              <a:buNone/>
+            </a:pPr>
+            <a:r>
+              <a:rPr lang="zh-CN" sz="1800" b="0" i="0" u="none" strike="noStrike" cap="none">
                 <a:solidFill>
                   <a:srgbClr val="111110"/>
                 </a:solidFill>
@@ -40763,20 +40904,69 @@
                 <a:cs typeface="Newsreader"/>
                 <a:sym typeface="Newsreader"/>
               </a:rPr>
-              <a:t>与专家反馈：AI完成任务，结果成为下一轮训练信号</a:t>
-            </a:r>
-          </a:p>
-        </p:txBody>
-      </p:sp>
-      <p:sp>
-        <p:nvSpPr>
-          <p:cNvPr id="5005" name="SimReal 5005"/>
+              <a:t>训练环境</a:t>
+            </a:r>
+          </a:p>
+        </p:txBody>
+      </p:sp>
+      <p:sp>
+        <p:nvSpPr>
+          <p:cNvPr id="5008" name="SimReal 5008"/>
+          <p:cNvSpPr txBox="1"/>
+          <p:nvPr/>
+        </p:nvSpPr>
+        <p:spPr>
+          <a:xfrm>
+            <a:off x="2834640" y="1645920"/>
+            <a:ext cx="3566160" cy="594360"/>
+          </a:xfrm>
+          <a:prstGeom prst="rect">
+            <a:avLst/>
+          </a:prstGeom>
+          <a:noFill/>
+          <a:ln>
+            <a:noFill/>
+          </a:ln>
+        </p:spPr>
+        <p:txBody>
+          <a:bodyPr spcFirstLastPara="1" wrap="square" lIns="0" tIns="0" rIns="0" bIns="0" anchor="ctr" anchorCtr="0">
+            <a:noAutofit/>
+          </a:bodyPr>
+          <a:lstStyle/>
+          <a:p>
+            <a:pPr marL="0" marR="0" lvl="0" indent="0" algn="l" rtl="0">
+              <a:spcBef>
+                <a:spcPts val="0"/>
+              </a:spcBef>
+              <a:spcAft>
+                <a:spcPts val="0"/>
+              </a:spcAft>
+              <a:buNone/>
+            </a:pPr>
+            <a:r>
+              <a:rPr lang="zh-CN" sz="1200" b="0" i="0" u="none" strike="noStrike" cap="none">
+                <a:solidFill>
+                  <a:srgbClr val="6E6C66"/>
+                </a:solidFill>
+                <a:latin typeface="Instrument Sans"/>
+                <a:ea typeface="Instrument Sans"/>
+                <a:cs typeface="Instrument Sans"/>
+                <a:sym typeface="Instrument Sans"/>
+              </a:rPr>
+              <a:t>还原真实工作</a:t>
+            </a:r>
+          </a:p>
+        </p:txBody>
+      </p:sp>
+      <p:sp>
+        <p:nvSpPr>
+          <p:cNvPr id="5009" name="SimReal 5009"/>
           <p:cNvSpPr/>
           <p:nvPr/>
         </p:nvSpPr>
         <p:spPr>
           <a:xfrm>
-            <a:off x="548640" y="1645920"/>
+            <a:off x="548640" y="2468880"/>
             <a:ext cx="6035040" cy="594360"/>
           </a:xfrm>
           <a:prstGeom prst="rect">
@@ -40799,13 +40989,13 @@
       </p:sp>
       <p:sp>
         <p:nvSpPr>
-          <p:cNvPr id="5006" name="SimReal 5006"/>
-          <p:cNvSpPr txBox="1"/>
-          <p:nvPr/>
-        </p:nvSpPr>
-        <p:spPr>
-          <a:xfrm>
-            <a:off x="777240" y="1645920"/>
+          <p:cNvPr id="5010" name="SimReal 5010"/>
+          <p:cNvSpPr txBox="1"/>
+          <p:nvPr/>
+        </p:nvSpPr>
+        <p:spPr>
+          <a:xfrm>
+            <a:off x="777240" y="2468880"/>
             <a:ext cx="457200" cy="594360"/>
           </a:xfrm>
           <a:prstGeom prst="rect">
@@ -40841,20 +41031,20 @@
                 <a:cs typeface="IBM Plex Mono"/>
                 <a:sym typeface="IBM Plex Mono"/>
               </a:rPr>
-              <a:t>01</a:t>
-            </a:r>
-          </a:p>
-        </p:txBody>
-      </p:sp>
-      <p:sp>
-        <p:nvSpPr>
-          <p:cNvPr id="5007" name="SimReal 5007"/>
-          <p:cNvSpPr txBox="1"/>
-          <p:nvPr/>
-        </p:nvSpPr>
-        <p:spPr>
-          <a:xfrm>
-            <a:off x="1234440" y="1645920"/>
+              <a:t>02</a:t>
+            </a:r>
+          </a:p>
+        </p:txBody>
+      </p:sp>
+      <p:sp>
+        <p:nvSpPr>
+          <p:cNvPr id="5011" name="SimReal 5011"/>
+          <p:cNvSpPr txBox="1"/>
+          <p:nvPr/>
+        </p:nvSpPr>
+        <p:spPr>
+          <a:xfrm>
+            <a:off x="1234440" y="2468880"/>
             <a:ext cx="1554480" cy="594360"/>
           </a:xfrm>
           <a:prstGeom prst="rect">
@@ -40890,20 +41080,20 @@
                 <a:cs typeface="Newsreader"/>
                 <a:sym typeface="Newsreader"/>
               </a:rPr>
-              <a:t>训练环境</a:t>
-            </a:r>
-          </a:p>
-        </p:txBody>
-      </p:sp>
-      <p:sp>
-        <p:nvSpPr>
-          <p:cNvPr id="5008" name="SimReal 5008"/>
-          <p:cNvSpPr txBox="1"/>
-          <p:nvPr/>
-        </p:nvSpPr>
-        <p:spPr>
-          <a:xfrm>
-            <a:off x="2834640" y="1645920"/>
+              <a:t>结果评分</a:t>
+            </a:r>
+          </a:p>
+        </p:txBody>
+      </p:sp>
+      <p:sp>
+        <p:nvSpPr>
+          <p:cNvPr id="5012" name="SimReal 5012"/>
+          <p:cNvSpPr txBox="1"/>
+          <p:nvPr/>
+        </p:nvSpPr>
+        <p:spPr>
+          <a:xfrm>
+            <a:off x="2834640" y="2468880"/>
             <a:ext cx="3566160" cy="594360"/>
           </a:xfrm>
           <a:prstGeom prst="rect">
@@ -40939,20 +41129,20 @@
                 <a:cs typeface="Instrument Sans"/>
                 <a:sym typeface="Instrument Sans"/>
               </a:rPr>
-              <a:t>还原真实工作</a:t>
-            </a:r>
-          </a:p>
-        </p:txBody>
-      </p:sp>
-      <p:sp>
-        <p:nvSpPr>
-          <p:cNvPr id="5009" name="SimReal 5009"/>
+              <a:t>按真实结果打分，不靠另一个AI的主观判断</a:t>
+            </a:r>
+          </a:p>
+        </p:txBody>
+      </p:sp>
+      <p:sp>
+        <p:nvSpPr>
+          <p:cNvPr id="5013" name="SimReal 5013"/>
           <p:cNvSpPr/>
           <p:nvPr/>
         </p:nvSpPr>
         <p:spPr>
           <a:xfrm>
-            <a:off x="548640" y="2468880"/>
+            <a:off x="548640" y="3291840"/>
             <a:ext cx="6035040" cy="594360"/>
           </a:xfrm>
           <a:prstGeom prst="rect">
@@ -40975,13 +41165,13 @@
       </p:sp>
       <p:sp>
         <p:nvSpPr>
-          <p:cNvPr id="5010" name="SimReal 5010"/>
-          <p:cNvSpPr txBox="1"/>
-          <p:nvPr/>
-        </p:nvSpPr>
-        <p:spPr>
-          <a:xfrm>
-            <a:off x="777240" y="2468880"/>
+          <p:cNvPr id="5014" name="SimReal 5014"/>
+          <p:cNvSpPr txBox="1"/>
+          <p:nvPr/>
+        </p:nvSpPr>
+        <p:spPr>
+          <a:xfrm>
+            <a:off x="777240" y="3291840"/>
             <a:ext cx="457200" cy="594360"/>
           </a:xfrm>
           <a:prstGeom prst="rect">
@@ -41017,20 +41207,20 @@
                 <a:cs typeface="IBM Plex Mono"/>
                 <a:sym typeface="IBM Plex Mono"/>
               </a:rPr>
-              <a:t>02</a:t>
-            </a:r>
-          </a:p>
-        </p:txBody>
-      </p:sp>
-      <p:sp>
-        <p:nvSpPr>
-          <p:cNvPr id="5011" name="SimReal 5011"/>
-          <p:cNvSpPr txBox="1"/>
-          <p:nvPr/>
-        </p:nvSpPr>
-        <p:spPr>
-          <a:xfrm>
-            <a:off x="1234440" y="2468880"/>
+              <a:t>03</a:t>
+            </a:r>
+          </a:p>
+        </p:txBody>
+      </p:sp>
+      <p:sp>
+        <p:nvSpPr>
+          <p:cNvPr id="5015" name="SimReal 5015"/>
+          <p:cNvSpPr txBox="1"/>
+          <p:nvPr/>
+        </p:nvSpPr>
+        <p:spPr>
+          <a:xfrm>
+            <a:off x="1234440" y="3291840"/>
             <a:ext cx="1554480" cy="594360"/>
           </a:xfrm>
           <a:prstGeom prst="rect">
@@ -41066,20 +41256,20 @@
                 <a:cs typeface="Newsreader"/>
                 <a:sym typeface="Newsreader"/>
               </a:rPr>
-              <a:t>结果评分</a:t>
-            </a:r>
-          </a:p>
-        </p:txBody>
-      </p:sp>
-      <p:sp>
-        <p:nvSpPr>
-          <p:cNvPr id="5012" name="SimReal 5012"/>
-          <p:cNvSpPr txBox="1"/>
-          <p:nvPr/>
-        </p:nvSpPr>
-        <p:spPr>
-          <a:xfrm>
-            <a:off x="2834640" y="2468880"/>
+              <a:t>专家反馈</a:t>
+            </a:r>
+          </a:p>
+        </p:txBody>
+      </p:sp>
+      <p:sp>
+        <p:nvSpPr>
+          <p:cNvPr id="5016" name="SimReal 5016"/>
+          <p:cNvSpPr txBox="1"/>
+          <p:nvPr/>
+        </p:nvSpPr>
+        <p:spPr>
+          <a:xfrm>
+            <a:off x="2834640" y="3291840"/>
             <a:ext cx="3566160" cy="594360"/>
           </a:xfrm>
           <a:prstGeom prst="rect">
@@ -41115,27 +41305,27 @@
                 <a:cs typeface="Instrument Sans"/>
                 <a:sym typeface="Instrument Sans"/>
               </a:rPr>
-              <a:t>按真实结果打分，不靠另一个AI的主观判断</a:t>
-            </a:r>
-          </a:p>
-        </p:txBody>
-      </p:sp>
-      <p:sp>
-        <p:nvSpPr>
-          <p:cNvPr id="5013" name="SimReal 5013"/>
+              <a:t>提供专业判断与评分标准</a:t>
+            </a:r>
+          </a:p>
+        </p:txBody>
+      </p:sp>
+      <p:sp>
+        <p:nvSpPr>
+          <p:cNvPr id="5017" name="SimReal 5017"/>
           <p:cNvSpPr/>
           <p:nvPr/>
         </p:nvSpPr>
         <p:spPr>
           <a:xfrm>
-            <a:off x="548640" y="3291840"/>
+            <a:off x="548640" y="4114800"/>
             <a:ext cx="6035040" cy="594360"/>
           </a:xfrm>
           <a:prstGeom prst="rect">
             <a:avLst/>
           </a:prstGeom>
           <a:solidFill>
-            <a:srgbClr val="F2F1EC"/>
+            <a:srgbClr val="111110"/>
           </a:solidFill>
           <a:ln>
             <a:noFill/>
@@ -41151,14 +41341,14 @@
       </p:sp>
       <p:sp>
         <p:nvSpPr>
-          <p:cNvPr id="5014" name="SimReal 5014"/>
-          <p:cNvSpPr txBox="1"/>
-          <p:nvPr/>
-        </p:nvSpPr>
-        <p:spPr>
-          <a:xfrm>
-            <a:off x="777240" y="3291840"/>
-            <a:ext cx="457200" cy="594360"/>
+          <p:cNvPr id="5018" name="SimReal 5018"/>
+          <p:cNvSpPr txBox="1"/>
+          <p:nvPr/>
+        </p:nvSpPr>
+        <p:spPr>
+          <a:xfrm>
+            <a:off x="777240" y="4114800"/>
+            <a:ext cx="2011680" cy="594360"/>
           </a:xfrm>
           <a:prstGeom prst="rect">
             <a:avLst/>
@@ -41186,28 +41376,28 @@
             <a:r>
               <a:rPr lang="zh-CN" sz="1000" b="0" i="0" u="none" strike="noStrike" cap="none">
                 <a:solidFill>
-                  <a:srgbClr val="C2410C"/>
+                  <a:srgbClr val="E27A3F"/>
                 </a:solidFill>
                 <a:latin typeface="IBM Plex Mono"/>
                 <a:ea typeface="IBM Plex Mono"/>
                 <a:cs typeface="IBM Plex Mono"/>
                 <a:sym typeface="IBM Plex Mono"/>
               </a:rPr>
-              <a:t>03</a:t>
-            </a:r>
-          </a:p>
-        </p:txBody>
-      </p:sp>
-      <p:sp>
-        <p:nvSpPr>
-          <p:cNvPr id="5015" name="SimReal 5015"/>
-          <p:cNvSpPr txBox="1"/>
-          <p:nvPr/>
-        </p:nvSpPr>
-        <p:spPr>
-          <a:xfrm>
-            <a:off x="1234440" y="3291840"/>
-            <a:ext cx="1554480" cy="594360"/>
+              <a:t>SimReal</a:t>
+            </a:r>
+          </a:p>
+        </p:txBody>
+      </p:sp>
+      <p:sp>
+        <p:nvSpPr>
+          <p:cNvPr id="5019" name="SimReal 5019"/>
+          <p:cNvSpPr txBox="1"/>
+          <p:nvPr/>
+        </p:nvSpPr>
+        <p:spPr>
+          <a:xfrm>
+            <a:off x="2834640" y="4114800"/>
+            <a:ext cx="3566160" cy="594360"/>
           </a:xfrm>
           <a:prstGeom prst="rect">
             <a:avLst/>
@@ -41233,30 +41423,59 @@
               <a:buNone/>
             </a:pPr>
             <a:r>
-              <a:rPr lang="zh-CN" sz="1800" b="0" i="0" u="none" strike="noStrike" cap="none">
-                <a:solidFill>
-                  <a:srgbClr val="111110"/>
+              <a:rPr lang="zh-CN" sz="1600" b="0" i="0" u="none" strike="noStrike" cap="none">
+                <a:solidFill>
+                  <a:srgbClr val="FAF9F6"/>
                 </a:solidFill>
                 <a:latin typeface="Newsreader"/>
                 <a:ea typeface="Newsreader"/>
                 <a:cs typeface="Newsreader"/>
                 <a:sym typeface="Newsreader"/>
               </a:rPr>
-              <a:t>专家反馈</a:t>
-            </a:r>
-          </a:p>
-        </p:txBody>
-      </p:sp>
-      <p:sp>
-        <p:nvSpPr>
-          <p:cNvPr id="5016" name="SimReal 5016"/>
-          <p:cNvSpPr txBox="1"/>
-          <p:nvPr/>
-        </p:nvSpPr>
-        <p:spPr>
-          <a:xfrm>
-            <a:off x="2834640" y="3291840"/>
-            <a:ext cx="3566160" cy="594360"/>
+              <a:t>同一套环境，打通评测、数据与训练</a:t>
+            </a:r>
+          </a:p>
+        </p:txBody>
+      </p:sp>
+      <p:sp>
+        <p:nvSpPr>
+          <p:cNvPr id="5020" name="SimReal 5020"/>
+          <p:cNvSpPr/>
+          <p:nvPr/>
+        </p:nvSpPr>
+        <p:spPr>
+          <a:xfrm>
+            <a:off x="7086600" y="1645920"/>
+            <a:ext cx="4553712" cy="594360"/>
+          </a:xfrm>
+          <a:prstGeom prst="rect">
+            <a:avLst/>
+          </a:prstGeom>
+          <a:solidFill>
+            <a:srgbClr val="F2F1EC"/>
+          </a:solidFill>
+          <a:ln>
+            <a:noFill/>
+          </a:ln>
+        </p:spPr>
+        <p:txBody>
+          <a:bodyPr/>
+          <a:lstStyle/>
+          <a:p>
+            <a:endParaRPr/>
+          </a:p>
+        </p:txBody>
+      </p:sp>
+      <p:sp>
+        <p:nvSpPr>
+          <p:cNvPr id="5021" name="SimReal 5021"/>
+          <p:cNvSpPr txBox="1"/>
+          <p:nvPr/>
+        </p:nvSpPr>
+        <p:spPr>
+          <a:xfrm>
+            <a:off x="7360920" y="1645920"/>
+            <a:ext cx="4005072" cy="594360"/>
           </a:xfrm>
           <a:prstGeom prst="rect">
             <a:avLst/>
@@ -41282,156 +41501,78 @@
               <a:buNone/>
             </a:pPr>
             <a:r>
-              <a:rPr lang="zh-CN" sz="1200" b="0" i="0" u="none" strike="noStrike" cap="none">
-                <a:solidFill>
-                  <a:srgbClr val="6E6C66"/>
-                </a:solidFill>
-                <a:latin typeface="Instrument Sans"/>
-                <a:ea typeface="Instrument Sans"/>
-                <a:cs typeface="Instrument Sans"/>
-                <a:sym typeface="Instrument Sans"/>
-              </a:rPr>
-              <a:t>提供专业判断与评分标准</a:t>
-            </a:r>
-          </a:p>
-        </p:txBody>
-      </p:sp>
-      <p:sp>
-        <p:nvSpPr>
-          <p:cNvPr id="5017" name="SimReal 5017"/>
-          <p:cNvSpPr/>
-          <p:nvPr/>
-        </p:nvSpPr>
-        <p:spPr>
-          <a:xfrm>
-            <a:off x="548640" y="4114800"/>
-            <a:ext cx="6035040" cy="594360"/>
-          </a:xfrm>
-          <a:prstGeom prst="rect">
-            <a:avLst/>
-          </a:prstGeom>
-          <a:solidFill>
-            <a:srgbClr val="111110"/>
-          </a:solidFill>
-          <a:ln>
-            <a:noFill/>
-          </a:ln>
-        </p:spPr>
-        <p:txBody>
-          <a:bodyPr/>
-          <a:lstStyle/>
-          <a:p>
-            <a:endParaRPr/>
-          </a:p>
-        </p:txBody>
-      </p:sp>
-      <p:sp>
-        <p:nvSpPr>
-          <p:cNvPr id="5018" name="SimReal 5018"/>
-          <p:cNvSpPr txBox="1"/>
-          <p:nvPr/>
-        </p:nvSpPr>
-        <p:spPr>
-          <a:xfrm>
-            <a:off x="777240" y="4114800"/>
-            <a:ext cx="2011680" cy="594360"/>
-          </a:xfrm>
-          <a:prstGeom prst="rect">
-            <a:avLst/>
-          </a:prstGeom>
-          <a:noFill/>
-          <a:ln>
-            <a:noFill/>
-          </a:ln>
-        </p:spPr>
-        <p:txBody>
-          <a:bodyPr spcFirstLastPara="1" wrap="square" lIns="0" tIns="0" rIns="0" bIns="0" anchor="ctr" anchorCtr="0">
-            <a:noAutofit/>
-          </a:bodyPr>
-          <a:lstStyle/>
-          <a:p>
-            <a:pPr marL="0" marR="0" lvl="0" indent="0" algn="l" rtl="0">
-              <a:spcBef>
-                <a:spcPts val="0"/>
-              </a:spcBef>
-              <a:spcAft>
-                <a:spcPts val="0"/>
-              </a:spcAft>
-              <a:buNone/>
-            </a:pPr>
-            <a:r>
-              <a:rPr lang="zh-CN" sz="1000" b="0" i="0" u="none" strike="noStrike" cap="none">
-                <a:solidFill>
-                  <a:srgbClr val="E27A3F"/>
-                </a:solidFill>
-                <a:latin typeface="IBM Plex Mono"/>
-                <a:ea typeface="IBM Plex Mono"/>
-                <a:cs typeface="IBM Plex Mono"/>
-                <a:sym typeface="IBM Plex Mono"/>
-              </a:rPr>
-              <a:t>SimReal</a:t>
-            </a:r>
-          </a:p>
-        </p:txBody>
-      </p:sp>
-      <p:sp>
-        <p:nvSpPr>
-          <p:cNvPr id="5019" name="SimReal 5019"/>
-          <p:cNvSpPr txBox="1"/>
-          <p:nvPr/>
-        </p:nvSpPr>
-        <p:spPr>
-          <a:xfrm>
-            <a:off x="2834640" y="4114800"/>
-            <a:ext cx="3566160" cy="594360"/>
-          </a:xfrm>
-          <a:prstGeom prst="rect">
-            <a:avLst/>
-          </a:prstGeom>
-          <a:noFill/>
-          <a:ln>
-            <a:noFill/>
-          </a:ln>
-        </p:spPr>
-        <p:txBody>
-          <a:bodyPr spcFirstLastPara="1" wrap="square" lIns="0" tIns="0" rIns="0" bIns="0" anchor="ctr" anchorCtr="0">
-            <a:noAutofit/>
-          </a:bodyPr>
-          <a:lstStyle/>
-          <a:p>
-            <a:pPr marL="0" marR="0" lvl="0" indent="0" algn="l" rtl="0">
-              <a:spcBef>
-                <a:spcPts val="0"/>
-              </a:spcBef>
-              <a:spcAft>
-                <a:spcPts val="0"/>
-              </a:spcAft>
-              <a:buNone/>
-            </a:pPr>
-            <a:r>
-              <a:rPr lang="zh-CN" sz="1600" b="0" i="0" u="none" strike="noStrike" cap="none">
-                <a:solidFill>
-                  <a:srgbClr val="FAF9F6"/>
+              <a:rPr lang="zh-CN" sz="1500" b="0" i="0" u="none" strike="noStrike" cap="none">
+                <a:solidFill>
+                  <a:srgbClr val="111110"/>
                 </a:solidFill>
                 <a:latin typeface="Newsreader"/>
                 <a:ea typeface="Newsreader"/>
                 <a:cs typeface="Newsreader"/>
                 <a:sym typeface="Newsreader"/>
               </a:rPr>
-              <a:t>同一套环境，连接评测、数据与训练</a:t>
-            </a:r>
-          </a:p>
-        </p:txBody>
-      </p:sp>
-      <p:sp>
-        <p:nvSpPr>
-          <p:cNvPr id="5020" name="SimReal 5020"/>
+              <a:t>AI行动</a:t>
+            </a:r>
+          </a:p>
+        </p:txBody>
+      </p:sp>
+      <p:sp>
+        <p:nvSpPr>
+          <p:cNvPr id="5022" name="SimReal 5022"/>
+          <p:cNvSpPr txBox="1"/>
+          <p:nvPr/>
+        </p:nvSpPr>
+        <p:spPr>
+          <a:xfrm>
+            <a:off x="7086600" y="2240280"/>
+            <a:ext cx="4553712" cy="228600"/>
+          </a:xfrm>
+          <a:prstGeom prst="rect">
+            <a:avLst/>
+          </a:prstGeom>
+          <a:noFill/>
+          <a:ln>
+            <a:noFill/>
+          </a:ln>
+        </p:spPr>
+        <p:txBody>
+          <a:bodyPr spcFirstLastPara="1" wrap="square" lIns="0" tIns="0" rIns="0" bIns="0" anchor="ctr" anchorCtr="0">
+            <a:noAutofit/>
+          </a:bodyPr>
+          <a:lstStyle/>
+          <a:p>
+            <a:pPr marL="0" marR="0" lvl="0" indent="0" algn="ctr" rtl="0">
+              <a:spcBef>
+                <a:spcPts val="0"/>
+              </a:spcBef>
+              <a:spcAft>
+                <a:spcPts val="0"/>
+              </a:spcAft>
+              <a:buNone/>
+            </a:pPr>
+            <a:r>
+              <a:rPr lang="zh-CN" sz="1100" b="0" i="0" u="none" strike="noStrike" cap="none">
+                <a:solidFill>
+                  <a:srgbClr val="6E6C66"/>
+                </a:solidFill>
+                <a:latin typeface="Instrument Sans"/>
+                <a:ea typeface="Instrument Sans"/>
+                <a:cs typeface="Instrument Sans"/>
+                <a:sym typeface="Instrument Sans"/>
+              </a:rPr>
+              <a:t>↓</a:t>
+            </a:r>
+          </a:p>
+        </p:txBody>
+      </p:sp>
+      <p:sp>
+        <p:nvSpPr>
+          <p:cNvPr id="5023" name="SimReal 5023"/>
           <p:cNvSpPr/>
           <p:nvPr/>
         </p:nvSpPr>
         <p:spPr>
           <a:xfrm>
-            <a:off x="7086600" y="1645920"/>
+            <a:off x="7086600" y="2468880"/>
             <a:ext cx="4553712" cy="594360"/>
           </a:xfrm>
           <a:prstGeom prst="rect">
@@ -41454,13 +41595,13 @@
       </p:sp>
       <p:sp>
         <p:nvSpPr>
-          <p:cNvPr id="5021" name="SimReal 5021"/>
-          <p:cNvSpPr txBox="1"/>
-          <p:nvPr/>
-        </p:nvSpPr>
-        <p:spPr>
-          <a:xfrm>
-            <a:off x="7360920" y="1645920"/>
+          <p:cNvPr id="5024" name="SimReal 5024"/>
+          <p:cNvSpPr txBox="1"/>
+          <p:nvPr/>
+        </p:nvSpPr>
+        <p:spPr>
+          <a:xfrm>
+            <a:off x="7360920" y="2468880"/>
             <a:ext cx="4005072" cy="594360"/>
           </a:xfrm>
           <a:prstGeom prst="rect">
@@ -41496,20 +41637,20 @@
                 <a:cs typeface="Newsreader"/>
                 <a:sym typeface="Newsreader"/>
               </a:rPr>
-              <a:t>AI行动</a:t>
-            </a:r>
-          </a:p>
-        </p:txBody>
-      </p:sp>
-      <p:sp>
-        <p:nvSpPr>
-          <p:cNvPr id="5022" name="SimReal 5022"/>
-          <p:cNvSpPr txBox="1"/>
-          <p:nvPr/>
-        </p:nvSpPr>
-        <p:spPr>
-          <a:xfrm>
-            <a:off x="7086600" y="2240280"/>
+              <a:t>世界给出反馈</a:t>
+            </a:r>
+          </a:p>
+        </p:txBody>
+      </p:sp>
+      <p:sp>
+        <p:nvSpPr>
+          <p:cNvPr id="5025" name="SimReal 5025"/>
+          <p:cNvSpPr txBox="1"/>
+          <p:nvPr/>
+        </p:nvSpPr>
+        <p:spPr>
+          <a:xfrm>
+            <a:off x="7086600" y="3063240"/>
             <a:ext cx="4553712" cy="228600"/>
           </a:xfrm>
           <a:prstGeom prst="rect">
@@ -41552,13 +41693,13 @@
       </p:sp>
       <p:sp>
         <p:nvSpPr>
-          <p:cNvPr id="5023" name="SimReal 5023"/>
+          <p:cNvPr id="5026" name="SimReal 5026"/>
           <p:cNvSpPr/>
           <p:nvPr/>
         </p:nvSpPr>
         <p:spPr>
           <a:xfrm>
-            <a:off x="7086600" y="2468880"/>
+            <a:off x="7086600" y="3291840"/>
             <a:ext cx="4553712" cy="594360"/>
           </a:xfrm>
           <a:prstGeom prst="rect">
@@ -41581,13 +41722,13 @@
       </p:sp>
       <p:sp>
         <p:nvSpPr>
-          <p:cNvPr id="5024" name="SimReal 5024"/>
-          <p:cNvSpPr txBox="1"/>
-          <p:nvPr/>
-        </p:nvSpPr>
-        <p:spPr>
-          <a:xfrm>
-            <a:off x="7360920" y="2468880"/>
+          <p:cNvPr id="5027" name="SimReal 5027"/>
+          <p:cNvSpPr txBox="1"/>
+          <p:nvPr/>
+        </p:nvSpPr>
+        <p:spPr>
+          <a:xfrm>
+            <a:off x="7360920" y="3291840"/>
             <a:ext cx="4005072" cy="594360"/>
           </a:xfrm>
           <a:prstGeom prst="rect">
@@ -41623,134 +41764,7 @@
                 <a:cs typeface="Newsreader"/>
                 <a:sym typeface="Newsreader"/>
               </a:rPr>
-              <a:t>世界给出反馈</a:t>
-            </a:r>
-          </a:p>
-        </p:txBody>
-      </p:sp>
-      <p:sp>
-        <p:nvSpPr>
-          <p:cNvPr id="5025" name="SimReal 5025"/>
-          <p:cNvSpPr txBox="1"/>
-          <p:nvPr/>
-        </p:nvSpPr>
-        <p:spPr>
-          <a:xfrm>
-            <a:off x="7086600" y="3063240"/>
-            <a:ext cx="4553712" cy="228600"/>
-          </a:xfrm>
-          <a:prstGeom prst="rect">
-            <a:avLst/>
-          </a:prstGeom>
-          <a:noFill/>
-          <a:ln>
-            <a:noFill/>
-          </a:ln>
-        </p:spPr>
-        <p:txBody>
-          <a:bodyPr spcFirstLastPara="1" wrap="square" lIns="0" tIns="0" rIns="0" bIns="0" anchor="ctr" anchorCtr="0">
-            <a:noAutofit/>
-          </a:bodyPr>
-          <a:lstStyle/>
-          <a:p>
-            <a:pPr marL="0" marR="0" lvl="0" indent="0" algn="ctr" rtl="0">
-              <a:spcBef>
-                <a:spcPts val="0"/>
-              </a:spcBef>
-              <a:spcAft>
-                <a:spcPts val="0"/>
-              </a:spcAft>
-              <a:buNone/>
-            </a:pPr>
-            <a:r>
-              <a:rPr lang="zh-CN" sz="1100" b="0" i="0" u="none" strike="noStrike" cap="none">
-                <a:solidFill>
-                  <a:srgbClr val="6E6C66"/>
-                </a:solidFill>
-                <a:latin typeface="Instrument Sans"/>
-                <a:ea typeface="Instrument Sans"/>
-                <a:cs typeface="Instrument Sans"/>
-                <a:sym typeface="Instrument Sans"/>
-              </a:rPr>
-              <a:t>↓</a:t>
-            </a:r>
-          </a:p>
-        </p:txBody>
-      </p:sp>
-      <p:sp>
-        <p:nvSpPr>
-          <p:cNvPr id="5026" name="SimReal 5026"/>
-          <p:cNvSpPr/>
-          <p:nvPr/>
-        </p:nvSpPr>
-        <p:spPr>
-          <a:xfrm>
-            <a:off x="7086600" y="3291840"/>
-            <a:ext cx="4553712" cy="594360"/>
-          </a:xfrm>
-          <a:prstGeom prst="rect">
-            <a:avLst/>
-          </a:prstGeom>
-          <a:solidFill>
-            <a:srgbClr val="F2F1EC"/>
-          </a:solidFill>
-          <a:ln>
-            <a:noFill/>
-          </a:ln>
-        </p:spPr>
-        <p:txBody>
-          <a:bodyPr/>
-          <a:lstStyle/>
-          <a:p>
-            <a:endParaRPr/>
-          </a:p>
-        </p:txBody>
-      </p:sp>
-      <p:sp>
-        <p:nvSpPr>
-          <p:cNvPr id="5027" name="SimReal 5027"/>
-          <p:cNvSpPr txBox="1"/>
-          <p:nvPr/>
-        </p:nvSpPr>
-        <p:spPr>
-          <a:xfrm>
-            <a:off x="7360920" y="3291840"/>
-            <a:ext cx="4005072" cy="594360"/>
-          </a:xfrm>
-          <a:prstGeom prst="rect">
-            <a:avLst/>
-          </a:prstGeom>
-          <a:noFill/>
-          <a:ln>
-            <a:noFill/>
-          </a:ln>
-        </p:spPr>
-        <p:txBody>
-          <a:bodyPr spcFirstLastPara="1" wrap="square" lIns="0" tIns="0" rIns="0" bIns="0" anchor="ctr" anchorCtr="0">
-            <a:noAutofit/>
-          </a:bodyPr>
-          <a:lstStyle/>
-          <a:p>
-            <a:pPr marL="0" marR="0" lvl="0" indent="0" algn="l" rtl="0">
-              <a:spcBef>
-                <a:spcPts val="0"/>
-              </a:spcBef>
-              <a:spcAft>
-                <a:spcPts val="0"/>
-              </a:spcAft>
-              <a:buNone/>
-            </a:pPr>
-            <a:r>
-              <a:rPr lang="zh-CN" sz="1500" b="0" i="0" u="none" strike="noStrike" cap="none">
-                <a:solidFill>
-                  <a:srgbClr val="111110"/>
-                </a:solidFill>
-                <a:latin typeface="Newsreader"/>
-                <a:ea typeface="Newsreader"/>
-                <a:cs typeface="Newsreader"/>
-                <a:sym typeface="Newsreader"/>
-              </a:rPr>
-              <a:t>按真实结果评分，留下轨迹数据</a:t>
+              <a:t>按真实结果评分，留下Agent轨迹</a:t>
             </a:r>
           </a:p>
         </p:txBody>

--- a/SimReal-BP-v27.pptx
+++ b/SimReal-BP-v27.pptx
@@ -7492,7 +7492,22 @@
                 <a:cs typeface="Instrument Sans"/>
                 <a:sym typeface="Instrument Sans"/>
               </a:rPr>
-              <a:t>私有评测集与留出集：只用于检验，从不参与训练</a:t>
+              <a:t>私有评测集与留出集：</a:t>
+            </a:r>
+            <a:br>
+              <a:rPr lang="zh-CN" sz="1150"/>
+            </a:br>
+            <a:r>
+              <a:rPr lang="zh-CN" sz="1150" b="0" i="0" u="none" strike="noStrike" cap="none">
+                <a:solidFill>
+                  <a:srgbClr val="33322F"/>
+                </a:solidFill>
+                <a:latin typeface="Instrument Sans"/>
+                <a:ea typeface="Instrument Sans"/>
+                <a:cs typeface="Instrument Sans"/>
+                <a:sym typeface="Instrument Sans"/>
+              </a:rPr>
+              <a:t>只用于检验，从不参与训练</a:t>
             </a:r>
           </a:p>
         </p:txBody>
@@ -17529,7 +17544,7 @@
         </p:nvSpPr>
         <p:spPr>
           <a:xfrm>
-            <a:off x="777240" y="3209544"/>
+            <a:off x="777240" y="3273552"/>
             <a:ext cx="2377440" cy="365760"/>
           </a:xfrm>
           <a:prstGeom prst="rect">
@@ -17659,7 +17674,7 @@
         </p:nvSpPr>
         <p:spPr>
           <a:xfrm>
-            <a:off x="777240" y="3977640"/>
+            <a:off x="777240" y="4041648"/>
             <a:ext cx="2377440" cy="365760"/>
           </a:xfrm>
           <a:prstGeom prst="rect">
@@ -27063,7 +27078,7 @@
         </p:blipFill>
         <p:spPr>
           <a:xfrm>
-            <a:off x="0" y="0"/>
+            <a:off x="0" y="-137160"/>
             <a:ext cx="1737360" cy="1645920"/>
           </a:xfrm>
           <a:prstGeom prst="rect">
@@ -30773,7 +30788,37 @@
                 <a:cs typeface="Instrument Sans"/>
                 <a:sym typeface="Instrument Sans"/>
               </a:rPr>
-              <a:t>TechCrunch（2025年2月，7,500万美元）；Mercor CEO（2025年9月，5亿美元）；Sacra（2025年12月，7.6亿美元）；Mercor（2026年初，10亿美元）；Dealroom（2026年6月，20亿美元）。均为毛营收，专家拿走60–70%（彭博）</a:t>
+              <a:t>TechCrunch（2025年2月，7,500万美元）；CEO（2025年9月，5亿美元）；</a:t>
+            </a:r>
+            <a:br>
+              <a:rPr lang="zh-CN" sz="900"/>
+            </a:br>
+            <a:r>
+              <a:rPr lang="zh-CN" sz="900" b="0" i="0" u="none" strike="noStrike" cap="none">
+                <a:solidFill>
+                  <a:srgbClr val="33322F"/>
+                </a:solidFill>
+                <a:latin typeface="Instrument Sans"/>
+                <a:ea typeface="Instrument Sans"/>
+                <a:cs typeface="Instrument Sans"/>
+                <a:sym typeface="Instrument Sans"/>
+              </a:rPr>
+              <a:t>Sacra（2025年12月，7.6亿美元）；Mercor（2026年初，10亿美元）；</a:t>
+            </a:r>
+            <a:br>
+              <a:rPr lang="zh-CN" sz="900"/>
+            </a:br>
+            <a:r>
+              <a:rPr lang="zh-CN" sz="900" b="0" i="0" u="none" strike="noStrike" cap="none">
+                <a:solidFill>
+                  <a:srgbClr val="33322F"/>
+                </a:solidFill>
+                <a:latin typeface="Instrument Sans"/>
+                <a:ea typeface="Instrument Sans"/>
+                <a:cs typeface="Instrument Sans"/>
+                <a:sym typeface="Instrument Sans"/>
+              </a:rPr>
+              <a:t>Dealroom（2026年6月，20亿美元）。均为毛营收，专家拿走60–70%（彭博）</a:t>
             </a:r>
           </a:p>
           <a:p>
@@ -30811,7 +30856,22 @@
                 <a:cs typeface="Instrument Sans"/>
                 <a:sym typeface="Instrument Sans"/>
               </a:rPr>
-              <a:t>A轮2.5亿美元（2024年9月）、B轮20亿美元（2025年2月）、C轮100亿美元（2025年10月）；200亿美元估值轮次处于早期洽谈（彭博，2026年7月9日）</a:t>
+              <a:t>A轮2.5亿（2024年9月）、B轮20亿（2025年2月）、C轮100亿美元（2025年10月）；</a:t>
+            </a:r>
+            <a:br>
+              <a:rPr lang="zh-CN" sz="900"/>
+            </a:br>
+            <a:r>
+              <a:rPr lang="zh-CN" sz="900" b="0" i="0" u="none" strike="noStrike" cap="none">
+                <a:solidFill>
+                  <a:srgbClr val="33322F"/>
+                </a:solidFill>
+                <a:latin typeface="Instrument Sans"/>
+                <a:ea typeface="Instrument Sans"/>
+                <a:cs typeface="Instrument Sans"/>
+                <a:sym typeface="Instrument Sans"/>
+              </a:rPr>
+              <a:t>200亿美元估值轮次处于早期洽谈（彭博，2026年7月9日）</a:t>
             </a:r>
           </a:p>
           <a:p>
@@ -30887,7 +30947,22 @@
                 <a:cs typeface="Instrument Sans"/>
                 <a:sym typeface="Instrument Sans"/>
               </a:rPr>
-              <a:t>公司公告及TechCrunch，2026年9月22日（以35亿美元估值融资3.5亿美元；年化收入3.75亿美元，一年增长18倍）</a:t>
+              <a:t>公司公告及TechCrunch，2026年9月22日（以35亿美元估值融资3.5亿美元；</a:t>
+            </a:r>
+            <a:br>
+              <a:rPr lang="zh-CN" sz="900"/>
+            </a:br>
+            <a:r>
+              <a:rPr lang="zh-CN" sz="900" b="0" i="0" u="none" strike="noStrike" cap="none">
+                <a:solidFill>
+                  <a:srgbClr val="33322F"/>
+                </a:solidFill>
+                <a:latin typeface="Instrument Sans"/>
+                <a:ea typeface="Instrument Sans"/>
+                <a:cs typeface="Instrument Sans"/>
+                <a:sym typeface="Instrument Sans"/>
+              </a:rPr>
+              <a:t>年化收入3.75亿美元，一年增长18倍）</a:t>
             </a:r>
           </a:p>
           <a:p>
@@ -30925,7 +31000,37 @@
                 <a:cs typeface="Instrument Sans"/>
                 <a:sym typeface="Instrument Sans"/>
               </a:rPr>
-              <a:t>2025年2月成立；福布斯，2026年9月1日（加入YC 18个月，估值32亿美元）；Business Wire（2026年4月，A轮估值3亿美元，年化收入1亿美元）；YC公司页（联合创始人曾在Citadel Securities实习）</a:t>
+              <a:t>2025年2月成立；福布斯，2026年9月1日（加入YC 18个月，估值32亿美元）；</a:t>
+            </a:r>
+            <a:br>
+              <a:rPr lang="zh-CN" sz="900"/>
+            </a:br>
+            <a:r>
+              <a:rPr lang="zh-CN" sz="900" b="0" i="0" u="none" strike="noStrike" cap="none">
+                <a:solidFill>
+                  <a:srgbClr val="33322F"/>
+                </a:solidFill>
+                <a:latin typeface="Instrument Sans"/>
+                <a:ea typeface="Instrument Sans"/>
+                <a:cs typeface="Instrument Sans"/>
+                <a:sym typeface="Instrument Sans"/>
+              </a:rPr>
+              <a:t>Business Wire（2026年4月，A轮估值3亿美元，年化收入1亿美元）；</a:t>
+            </a:r>
+            <a:br>
+              <a:rPr lang="zh-CN" sz="900"/>
+            </a:br>
+            <a:r>
+              <a:rPr lang="zh-CN" sz="900" b="0" i="0" u="none" strike="noStrike" cap="none">
+                <a:solidFill>
+                  <a:srgbClr val="33322F"/>
+                </a:solidFill>
+                <a:latin typeface="Instrument Sans"/>
+                <a:ea typeface="Instrument Sans"/>
+                <a:cs typeface="Instrument Sans"/>
+                <a:sym typeface="Instrument Sans"/>
+              </a:rPr>
+              <a:t>YC公司页（联合创始人曾在Citadel Securities实习）</a:t>
             </a:r>
           </a:p>
           <a:p>
@@ -31386,7 +31491,22 @@
                 <a:cs typeface="Instrument Sans"/>
                 <a:sym typeface="Instrument Sans"/>
               </a:rPr>
-              <a:t>Epoch AI《Will we run out of data?》（2024）：预计2026–2032年间用尽（80%置信区间）</a:t>
+              <a:t>Epoch AI《Will we run out of data?》（2024）：</a:t>
+            </a:r>
+            <a:br>
+              <a:rPr lang="zh-CN" sz="900"/>
+            </a:br>
+            <a:r>
+              <a:rPr lang="zh-CN" sz="900" b="0" i="0" u="none" strike="noStrike" cap="none">
+                <a:solidFill>
+                  <a:srgbClr val="33322F"/>
+                </a:solidFill>
+                <a:latin typeface="Instrument Sans"/>
+                <a:ea typeface="Instrument Sans"/>
+                <a:cs typeface="Instrument Sans"/>
+                <a:sym typeface="Instrument Sans"/>
+              </a:rPr>
+              <a:t>预计2026–2032年间用尽（80%置信区间）</a:t>
             </a:r>
           </a:p>
           <a:p>
@@ -31424,7 +31544,22 @@
                 <a:cs typeface="Instrument Sans"/>
                 <a:sym typeface="Instrument Sans"/>
               </a:rPr>
-              <a:t>Applied Compute：Upstarts（2025年6月，种子轮2,000万美元，投后1亿美元）、The Information（2026年8月，约30亿美元洽谈）</a:t>
+              <a:t>Applied Compute：Upstarts（2025年6月，种子轮2,000万美元，投后1亿美元）；</a:t>
+            </a:r>
+            <a:br>
+              <a:rPr lang="zh-CN" sz="900"/>
+            </a:br>
+            <a:r>
+              <a:rPr lang="zh-CN" sz="900" b="0" i="0" u="none" strike="noStrike" cap="none">
+                <a:solidFill>
+                  <a:srgbClr val="33322F"/>
+                </a:solidFill>
+                <a:latin typeface="Instrument Sans"/>
+                <a:ea typeface="Instrument Sans"/>
+                <a:cs typeface="Instrument Sans"/>
+                <a:sym typeface="Instrument Sans"/>
+              </a:rPr>
+              <a:t>The Information（2026年8月，约30亿美元洽谈）</a:t>
             </a:r>
           </a:p>
         </p:txBody>
@@ -32815,7 +32950,7 @@
                 <a:cs typeface="Instrument Sans"/>
                 <a:sym typeface="Instrument Sans"/>
               </a:rPr>
-              <a:t>上线前模拟作弊与攻击，找出并修补评分漏洞</a:t>
+              <a:t>上线前模拟作弊与攻击，修补评分漏洞</a:t>
             </a:r>
           </a:p>
         </p:txBody>
@@ -39165,10 +39300,10 @@
                 <a:solidFill>
                   <a:srgbClr val="6E6C66"/>
                 </a:solidFill>
-                <a:latin typeface="IBM Plex Mono"/>
-                <a:ea typeface="IBM Plex Mono"/>
-                <a:cs typeface="IBM Plex Mono"/>
-                <a:sym typeface="IBM Plex Mono"/>
+                <a:latin typeface="Instrument Sans"/>
+                <a:ea typeface="Instrument Sans"/>
+                <a:cs typeface="Instrument Sans"/>
+                <a:sym typeface="Instrument Sans"/>
               </a:rPr>
               <a:t>第一代 · 互联网数据</a:t>
             </a:r>
@@ -39422,10 +39557,10 @@
                 <a:solidFill>
                   <a:srgbClr val="6E6C66"/>
                 </a:solidFill>
-                <a:latin typeface="IBM Plex Mono"/>
-                <a:ea typeface="IBM Plex Mono"/>
-                <a:cs typeface="IBM Plex Mono"/>
-                <a:sym typeface="IBM Plex Mono"/>
+                <a:latin typeface="Instrument Sans"/>
+                <a:ea typeface="Instrument Sans"/>
+                <a:cs typeface="Instrument Sans"/>
+                <a:sym typeface="Instrument Sans"/>
               </a:rPr>
               <a:t>第二代 · 人类偏好</a:t>
             </a:r>
@@ -39679,10 +39814,10 @@
                 <a:solidFill>
                   <a:srgbClr val="6E6C66"/>
                 </a:solidFill>
-                <a:latin typeface="IBM Plex Mono"/>
-                <a:ea typeface="IBM Plex Mono"/>
-                <a:cs typeface="IBM Plex Mono"/>
-                <a:sym typeface="IBM Plex Mono"/>
+                <a:latin typeface="Instrument Sans"/>
+                <a:ea typeface="Instrument Sans"/>
+                <a:cs typeface="Instrument Sans"/>
+                <a:sym typeface="Instrument Sans"/>
               </a:rPr>
               <a:t>第三代 · 标准答案</a:t>
             </a:r>
@@ -39936,10 +40071,10 @@
                 <a:solidFill>
                   <a:srgbClr val="E27A3F"/>
                 </a:solidFill>
-                <a:latin typeface="IBM Plex Mono"/>
-                <a:ea typeface="IBM Plex Mono"/>
-                <a:cs typeface="IBM Plex Mono"/>
-                <a:sym typeface="IBM Plex Mono"/>
+                <a:latin typeface="Instrument Sans"/>
+                <a:ea typeface="Instrument Sans"/>
+                <a:cs typeface="Instrument Sans"/>
+                <a:sym typeface="Instrument Sans"/>
               </a:rPr>
               <a:t>第四代 · 真实世界的反馈</a:t>
             </a:r>
@@ -46535,10 +46670,10 @@
                 <a:solidFill>
                   <a:srgbClr val="6E6C66"/>
                 </a:solidFill>
-                <a:latin typeface="IBM Plex Mono"/>
-                <a:ea typeface="IBM Plex Mono"/>
-                <a:cs typeface="IBM Plex Mono"/>
-                <a:sym typeface="IBM Plex Mono"/>
+                <a:latin typeface="Instrument Sans"/>
+                <a:ea typeface="Instrument Sans"/>
+                <a:cs typeface="Instrument Sans"/>
+                <a:sym typeface="Instrument Sans"/>
               </a:rPr>
               <a:t>合计400星标  ·  2026年9月29日</a:t>
             </a:r>
